--- a/public/blog/presentations/es/tractor-trailer-injury-in-las-vegas-nevada-legal-steps-2026.pptx
+++ b/public/blog/presentations/es/tractor-trailer-injury-in-las-vegas-nevada-legal-steps-2026.pptx
@@ -4704,7 +4704,7 @@
               </a:defRPr>
             </a:pPr>
             <a:r>
-              <a:t>Truck Accidents · Nevada · 2026-06-08</a:t>
+              <a:t>Truck Accidents · Nevada · 2026-06-11</a:t>
             </a:r>
           </a:p>
         </p:txBody>
